--- a/management-seminars/week09_stakeholder_deliverables.pptx
+++ b/management-seminars/week09_stakeholder_deliverables.pptx
@@ -11,6 +11,7 @@
     <p:sldId id="269" r:id="rId20"/>
     <p:sldId id="270" r:id="rId21"/>
     <p:sldId id="271" r:id="rId22"/>
+    <p:sldId id="272" r:id="rId11"/>
   </p:sldIdLst>
   <p:notesMasterIdLst>
     <p:notesMasterId r:id="rId12"/>
@@ -857,6 +858,76 @@
           <a:p>
             <a:r>
               <a:t>Many organizations have hundreds of unused reports. Color-blind-safe palettes and readable fonts make outputs usable by everyone. Retiring outdated reports keeps the trusted ones visible.</a:t>
+            </a:r>
+          </a:p>
+        </p:txBody>
+      </p:sp>
+      <p:sp>
+        <p:nvSpPr>
+          <p:cNvPr id="4" name="Slide Number Placeholder 3"/>
+          <p:cNvSpPr>
+            <a:spLocks noGrp="1"/>
+          </p:cNvSpPr>
+          <p:nvPr>
+            <p:ph type="sldNum" idx="5" sz="quarter"/>
+          </p:nvPr>
+        </p:nvSpPr>
+        <p:spPr/>
+      </p:sp>
+    </p:spTree>
+  </p:cSld>
+  <p:clrMapOvr>
+    <a:masterClrMapping/>
+  </p:clrMapOvr>
+</p:notes>
+</file>
+
+<file path=ppt/notesSlides/notesSlide7.xml><?xml version="1.0" encoding="utf-8"?>
+<p:notes xmlns:a="http://schemas.openxmlformats.org/drawingml/2006/main" xmlns:p="http://schemas.openxmlformats.org/presentationml/2006/main" xmlns:r="http://schemas.openxmlformats.org/officeDocument/2006/relationships">
+  <p:cSld>
+    <p:spTree>
+      <p:nvGrpSpPr>
+        <p:cNvPr id="1" name=""/>
+        <p:cNvGrpSpPr/>
+        <p:nvPr/>
+      </p:nvGrpSpPr>
+      <p:grpSpPr>
+        <a:xfrm>
+          <a:off x="0" y="0"/>
+          <a:ext cx="0" cy="0"/>
+          <a:chOff x="0" y="0"/>
+          <a:chExt cx="0" cy="0"/>
+        </a:xfrm>
+      </p:grpSpPr>
+      <p:sp>
+        <p:nvSpPr>
+          <p:cNvPr id="2" name="Slide Image Placeholder 1"/>
+          <p:cNvSpPr>
+            <a:spLocks noGrp="1"/>
+          </p:cNvSpPr>
+          <p:nvPr>
+            <p:ph type="sldImg" idx="2"/>
+          </p:nvPr>
+        </p:nvSpPr>
+        <p:spPr/>
+      </p:sp>
+      <p:sp>
+        <p:nvSpPr>
+          <p:cNvPr id="3" name="Notes Placeholder 2"/>
+          <p:cNvSpPr>
+            <a:spLocks noGrp="1"/>
+          </p:cNvSpPr>
+          <p:nvPr>
+            <p:ph type="body" idx="3" sz="quarter"/>
+          </p:nvPr>
+        </p:nvSpPr>
+        <p:spPr/>
+        <p:txBody>
+          <a:bodyPr/>
+          <a:lstStyle/>
+          <a:p>
+            <a:r>
+              <a:t>Give students a few minutes to write an answer drawn from their own experience and career, then ask two or three to share. Connect their examples back to this seminar's content. In an online section, post the same question to the discussion board.</a:t>
             </a:r>
           </a:p>
         </p:txBody>
@@ -1506,7 +1577,7 @@
 </p:sldMaster>
 </file>
 
-<file path=ppt/slides/slide11.xml><?xml version="1.0" encoding="utf-8"?>
+<file path=ppt/slides/slide1.xml><?xml version="1.0" encoding="utf-8"?>
 <p:sld xmlns:a="http://schemas.openxmlformats.org/drawingml/2006/main" xmlns:p="http://schemas.openxmlformats.org/presentationml/2006/main" xmlns:r="http://schemas.openxmlformats.org/officeDocument/2006/relationships">
   <p:cSld>
     <p:spTree>
@@ -1600,7 +1671,7 @@
 </p:sld>
 </file>
 
-<file path=ppt/slides/slide12.xml><?xml version="1.0" encoding="utf-8"?>
+<file path=ppt/slides/slide2.xml><?xml version="1.0" encoding="utf-8"?>
 <p:sld xmlns:a="http://schemas.openxmlformats.org/drawingml/2006/main" xmlns:p="http://schemas.openxmlformats.org/presentationml/2006/main" xmlns:r="http://schemas.openxmlformats.org/officeDocument/2006/relationships">
   <p:cSld>
     <p:spTree>
@@ -1797,7 +1868,7 @@
 </p:sld>
 </file>
 
-<file path=ppt/slides/slide13.xml><?xml version="1.0" encoding="utf-8"?>
+<file path=ppt/slides/slide3.xml><?xml version="1.0" encoding="utf-8"?>
 <p:sld xmlns:a="http://schemas.openxmlformats.org/drawingml/2006/main" xmlns:p="http://schemas.openxmlformats.org/presentationml/2006/main" xmlns:r="http://schemas.openxmlformats.org/officeDocument/2006/relationships">
   <p:cSld>
     <p:spTree>
@@ -1994,7 +2065,7 @@
 </p:sld>
 </file>
 
-<file path=ppt/slides/slide14.xml><?xml version="1.0" encoding="utf-8"?>
+<file path=ppt/slides/slide4.xml><?xml version="1.0" encoding="utf-8"?>
 <p:sld xmlns:a="http://schemas.openxmlformats.org/drawingml/2006/main" xmlns:p="http://schemas.openxmlformats.org/presentationml/2006/main" xmlns:r="http://schemas.openxmlformats.org/officeDocument/2006/relationships">
   <p:cSld>
     <p:spTree>
@@ -2191,7 +2262,7 @@
 </p:sld>
 </file>
 
-<file path=ppt/slides/slide15.xml><?xml version="1.0" encoding="utf-8"?>
+<file path=ppt/slides/slide5.xml><?xml version="1.0" encoding="utf-8"?>
 <p:sld xmlns:a="http://schemas.openxmlformats.org/drawingml/2006/main" xmlns:p="http://schemas.openxmlformats.org/presentationml/2006/main" xmlns:r="http://schemas.openxmlformats.org/officeDocument/2006/relationships">
   <p:cSld>
     <p:spTree>
@@ -2370,7 +2441,7 @@
 </p:sld>
 </file>
 
-<file path=ppt/slides/slide16.xml><?xml version="1.0" encoding="utf-8"?>
+<file path=ppt/slides/slide6.xml><?xml version="1.0" encoding="utf-8"?>
 <p:sld xmlns:a="http://schemas.openxmlformats.org/drawingml/2006/main" xmlns:p="http://schemas.openxmlformats.org/presentationml/2006/main" xmlns:r="http://schemas.openxmlformats.org/officeDocument/2006/relationships">
   <p:cSld>
     <p:spTree>
@@ -2536,6 +2607,167 @@
             <a:fld id="{F7021451-1387-4CA6-816F-3879F97B5CBC}" type="slidenum">
               <a:rPr b="0" lang="en-US"/>
               <a:t>6</a:t>
+            </a:fld>
+            <a:endParaRPr lang="en-US"/>
+          </a:p>
+        </p:txBody>
+      </p:sp>
+    </p:spTree>
+  </p:cSld>
+  <p:clrMapOvr>
+    <a:masterClrMapping/>
+  </p:clrMapOvr>
+</p:sld>
+</file>
+
+<file path=ppt/slides/slide7.xml><?xml version="1.0" encoding="utf-8"?>
+<p:sld xmlns:a="http://schemas.openxmlformats.org/drawingml/2006/main" xmlns:p="http://schemas.openxmlformats.org/presentationml/2006/main" xmlns:r="http://schemas.openxmlformats.org/officeDocument/2006/relationships">
+  <p:cSld>
+    <p:spTree>
+      <p:nvGrpSpPr>
+        <p:cNvPr id="1" name=""/>
+        <p:cNvGrpSpPr/>
+        <p:nvPr/>
+      </p:nvGrpSpPr>
+      <p:grpSpPr/>
+      <p:sp>
+        <p:nvSpPr>
+          <p:cNvPr id="2" name="Text 0"/>
+          <p:cNvSpPr/>
+          <p:nvPr>
+            <p:ph idx="100" type="title" hasCustomPrompt="1"/>
+          </p:nvPr>
+        </p:nvSpPr>
+        <p:spPr>
+          <a:xfrm>
+            <a:off x="731520" y="457200"/>
+            <a:ext cx="10698480" cy="822960"/>
+          </a:xfrm>
+          <a:prstGeom prst="rect">
+            <a:avLst/>
+          </a:prstGeom>
+          <a:noFill/>
+          <a:ln/>
+        </p:spPr>
+        <p:txBody>
+          <a:bodyPr wrap="square" lIns="0" tIns="0" rIns="0" bIns="0" rtlCol="0" anchor="t"/>
+          <a:lstStyle/>
+          <a:p>
+            <a:pPr algn="l" indent="0" marL="0">
+              <a:buNone/>
+            </a:pPr>
+            <a:r>
+              <a:rPr lang="en-US" sz="3200" b="1" dirty="0">
+                <a:solidFill>
+                  <a:srgbClr val="FFFFFF"/>
+                </a:solidFill>
+              </a:rPr>
+              <a:t>Discussion</a:t>
+            </a:r>
+            <a:endParaRPr lang="en-US" sz="3200" dirty="0"/>
+          </a:p>
+        </p:txBody>
+      </p:sp>
+      <p:sp>
+        <p:nvSpPr>
+          <p:cNvPr id="3" name="Text 0"/>
+          <p:cNvSpPr/>
+          <p:nvPr>
+            <p:ph idx="101" type="body" hasCustomPrompt="1"/>
+          </p:nvPr>
+        </p:nvSpPr>
+        <p:spPr>
+          <a:xfrm>
+            <a:off x="731520" y="1554480"/>
+            <a:ext cx="10698480" cy="4754880"/>
+          </a:xfrm>
+          <a:prstGeom prst="rect">
+            <a:avLst/>
+          </a:prstGeom>
+          <a:noFill/>
+          <a:ln/>
+        </p:spPr>
+        <p:txBody>
+          <a:bodyPr wrap="square" rtlCol="0" anchor="t"/>
+          <a:lstStyle/>
+          <a:p>
+            <a:pPr algn="l" marL="342900" indent="-342900">
+              <a:spcAft>
+                <a:spcPts val="1000"/>
+              </a:spcAft>
+              <a:buSzPct val="100000"/>
+              <a:buChar char="•"/>
+            </a:pPr>
+            <a:r>
+              <a:rPr lang="en-US" sz="2400" dirty="0">
+                <a:solidFill>
+                  <a:srgbClr val="FFFFFF"/>
+                </a:solidFill>
+              </a:rPr>
+              <a:t>Think of a report or dashboard you receive. Is it the right format for the decision it supports, and what would you change?</a:t>
+            </a:r>
+            <a:endParaRPr lang="en-US" sz="2400" dirty="0"/>
+          </a:p>
+          <a:p>
+            <a:pPr algn="l" marL="342900" indent="-342900">
+              <a:spcAft>
+                <a:spcPts val="1000"/>
+              </a:spcAft>
+              <a:buSzPct val="100000"/>
+              <a:buChar char="•"/>
+            </a:pPr>
+            <a:r>
+              <a:rPr lang="en-US" sz="2400" dirty="0">
+                <a:solidFill>
+                  <a:srgbClr val="FFFFFF"/>
+                </a:solidFill>
+              </a:rPr>
+              <a:t>Draw on your own experience and career, and apply today's seminar to that setting.</a:t>
+            </a:r>
+            <a:endParaRPr lang="en-US" sz="2400" dirty="0"/>
+          </a:p>
+        </p:txBody>
+      </p:sp>
+      <p:sp>
+        <p:nvSpPr>
+          <p:cNvPr id="25" name="Slide Number Placeholder 0"/>
+          <p:cNvSpPr>
+            <a:spLocks noGrp="1"/>
+          </p:cNvSpPr>
+          <p:nvPr>
+            <p:ph type="sldNum" sz="quarter" idx="4294967295"/>
+          </p:nvPr>
+        </p:nvSpPr>
+        <p:spPr>
+          <a:xfrm>
+            <a:off x="10972800" y="6400800"/>
+            <a:ext cx="548640" cy="274320"/>
+          </a:xfrm>
+          <a:prstGeom prst="rect">
+            <a:avLst/>
+          </a:prstGeom>
+          <a:extLst>
+            <a:ext uri="{C572A759-6A51-4108-AA02-DFA0A04FC94B}">
+              <ma14:wrappingTextBoxFlag xmlns:ma14="http://schemas.microsoft.com/office/mac/drawingml/2011/main" val="0"/>
+            </a:ext>
+          </a:extLst>
+        </p:spPr>
+        <p:txBody>
+          <a:bodyPr/>
+          <a:lstStyle>
+            <a:lvl1pPr>
+              <a:defRPr sz="1000">
+                <a:solidFill>
+                  <a:srgbClr val="BFBFBF"/>
+                </a:solidFill>
+              </a:defRPr>
+            </a:lvl1pPr>
+          </a:lstStyle>
+          <a:p>
+            <a:pPr algn="r"/>
+            <a:fld id="{F7021451-1387-4CA6-816F-3879F97B5CBC}" type="slidenum">
+              <a:rPr b="0" lang="en-US"/>
+              <a:t>7</a:t>
             </a:fld>
             <a:endParaRPr lang="en-US"/>
           </a:p>

--- a/management-seminars/week09_stakeholder_deliverables.pptx
+++ b/management-seminars/week09_stakeholder_deliverables.pptx
@@ -1619,7 +1619,7 @@
                   <a:srgbClr val="FFFFFF"/>
                 </a:solidFill>
               </a:rPr>
-              <a:t>Designing the Right Stakeholder Deliverables</a:t>
+              <a:t>Week 9: Designing the Right Stakeholder Deliverables</a:t>
             </a:r>
             <a:endParaRPr lang="en-US" sz="4000" dirty="0"/>
           </a:p>
